--- a/반도체_투자_세미나_20260728.pptx
+++ b/반도체_투자_세미나_20260728.pptx
@@ -10099,8 +10099,8 @@
         </p:nvSpPr>
         <p:spPr>
           <a:xfrm>
-            <a:off x="502920" y="5806440"/>
-            <a:ext cx="11183112" cy="640080"/>
+            <a:off x="502920" y="6053328"/>
+            <a:ext cx="11183112" cy="566928"/>
           </a:xfrm>
           <a:prstGeom prst="rect">
             <a:avLst/>
@@ -17213,7 +17213,7 @@
         </p:nvSpPr>
         <p:spPr>
           <a:xfrm>
-            <a:off x="502920" y="3383280"/>
+            <a:off x="502920" y="3346704"/>
             <a:ext cx="10972800" cy="274320"/>
           </a:xfrm>
           <a:prstGeom prst="rect">
@@ -17238,7 +17238,7 @@
                 <a:ea typeface="Spoqa Han Sans Neo" pitchFamily="34" charset="-122"/>
                 <a:cs typeface="Spoqa Han Sans Neo" pitchFamily="34" charset="-120"/>
               </a:rPr>
-              <a:t>②  이번 주 발표 — 이제 국내 차례</a:t>
+              <a:t>②  이번 주 발표 예정 — 이제 국내 차례</a:t>
             </a:r>
             <a:endParaRPr lang="en-US" sz="1350" dirty="0"/>
           </a:p>
@@ -17252,12 +17252,340 @@
         </p:nvSpPr>
         <p:spPr>
           <a:xfrm>
-            <a:off x="502920" y="3694176"/>
-            <a:ext cx="11183112" cy="1481328"/>
+            <a:off x="502920" y="3675888"/>
+            <a:ext cx="2706624" cy="457200"/>
           </a:xfrm>
           <a:prstGeom prst="roundRect">
             <a:avLst>
-              <a:gd name="adj" fmla="val 3704"/>
+              <a:gd name="adj" fmla="val 10000"/>
+            </a:avLst>
+          </a:prstGeom>
+          <a:solidFill>
+            <a:srgbClr val="F58220">
+              <a:alpha val="12000"/>
+            </a:srgbClr>
+          </a:solidFill>
+          <a:ln w="9525">
+            <a:solidFill>
+              <a:srgbClr val="F58220"/>
+            </a:solidFill>
+            <a:prstDash val="solid"/>
+          </a:ln>
+        </p:spPr>
+      </p:sp>
+      <p:sp>
+        <p:nvSpPr>
+          <p:cNvPr id="23" name="Text 21"/>
+          <p:cNvSpPr/>
+          <p:nvPr/>
+        </p:nvSpPr>
+        <p:spPr>
+          <a:xfrm>
+            <a:off x="685800" y="3675888"/>
+            <a:ext cx="2432304" cy="457200"/>
+          </a:xfrm>
+          <a:prstGeom prst="rect">
+            <a:avLst/>
+          </a:prstGeom>
+          <a:noFill/>
+          <a:ln/>
+        </p:spPr>
+        <p:txBody>
+          <a:bodyPr wrap="square" lIns="0" tIns="0" rIns="0" bIns="0" rtlCol="0" anchor="ctr"/>
+          <a:lstStyle/>
+          <a:p>
+            <a:pPr indent="0" marL="0">
+              <a:buNone/>
+            </a:pPr>
+            <a:r>
+              <a:rPr lang="en-US" sz="1200" b="1" dirty="0">
+                <a:solidFill>
+                  <a:srgbClr val="F58220"/>
+                </a:solidFill>
+                <a:latin typeface="Spoqa Han Sans Neo" pitchFamily="34" charset="0"/>
+                <a:ea typeface="Spoqa Han Sans Neo" pitchFamily="34" charset="-122"/>
+                <a:cs typeface="Spoqa Han Sans Neo" pitchFamily="34" charset="-120"/>
+              </a:rPr>
+              <a:t>7/29   </a:t>
+            </a:r>
+            <a:pPr indent="0" marL="0">
+              <a:buNone/>
+            </a:pPr>
+            <a:r>
+              <a:rPr lang="en-US" sz="1250" b="1" dirty="0">
+                <a:solidFill>
+                  <a:srgbClr val="1A1A1A"/>
+                </a:solidFill>
+                <a:latin typeface="Spoqa Han Sans Neo" pitchFamily="34" charset="0"/>
+                <a:ea typeface="Spoqa Han Sans Neo" pitchFamily="34" charset="-122"/>
+                <a:cs typeface="Spoqa Han Sans Neo" pitchFamily="34" charset="-120"/>
+              </a:rPr>
+              <a:t>SK하이닉스</a:t>
+            </a:r>
+            <a:endParaRPr lang="en-US" sz="1200" dirty="0"/>
+          </a:p>
+        </p:txBody>
+      </p:sp>
+      <p:sp>
+        <p:nvSpPr>
+          <p:cNvPr id="24" name="Shape 22"/>
+          <p:cNvSpPr/>
+          <p:nvPr/>
+        </p:nvSpPr>
+        <p:spPr>
+          <a:xfrm>
+            <a:off x="3300984" y="3675888"/>
+            <a:ext cx="2706624" cy="457200"/>
+          </a:xfrm>
+          <a:prstGeom prst="roundRect">
+            <a:avLst>
+              <a:gd name="adj" fmla="val 10000"/>
+            </a:avLst>
+          </a:prstGeom>
+          <a:solidFill>
+            <a:srgbClr val="043B72">
+              <a:alpha val="12000"/>
+            </a:srgbClr>
+          </a:solidFill>
+          <a:ln w="9525">
+            <a:solidFill>
+              <a:srgbClr val="043B72"/>
+            </a:solidFill>
+            <a:prstDash val="solid"/>
+          </a:ln>
+        </p:spPr>
+      </p:sp>
+      <p:sp>
+        <p:nvSpPr>
+          <p:cNvPr id="25" name="Text 23"/>
+          <p:cNvSpPr/>
+          <p:nvPr/>
+        </p:nvSpPr>
+        <p:spPr>
+          <a:xfrm>
+            <a:off x="3483864" y="3675888"/>
+            <a:ext cx="2432304" cy="457200"/>
+          </a:xfrm>
+          <a:prstGeom prst="rect">
+            <a:avLst/>
+          </a:prstGeom>
+          <a:noFill/>
+          <a:ln/>
+        </p:spPr>
+        <p:txBody>
+          <a:bodyPr wrap="square" lIns="0" tIns="0" rIns="0" bIns="0" rtlCol="0" anchor="ctr"/>
+          <a:lstStyle/>
+          <a:p>
+            <a:pPr indent="0" marL="0">
+              <a:buNone/>
+            </a:pPr>
+            <a:r>
+              <a:rPr lang="en-US" sz="1200" b="1" dirty="0">
+                <a:solidFill>
+                  <a:srgbClr val="043B72"/>
+                </a:solidFill>
+                <a:latin typeface="Spoqa Han Sans Neo" pitchFamily="34" charset="0"/>
+                <a:ea typeface="Spoqa Han Sans Neo" pitchFamily="34" charset="-122"/>
+                <a:cs typeface="Spoqa Han Sans Neo" pitchFamily="34" charset="-120"/>
+              </a:rPr>
+              <a:t>7/29   </a:t>
+            </a:r>
+            <a:pPr indent="0" marL="0">
+              <a:buNone/>
+            </a:pPr>
+            <a:r>
+              <a:rPr lang="en-US" sz="1250" b="1" dirty="0">
+                <a:solidFill>
+                  <a:srgbClr val="1A1A1A"/>
+                </a:solidFill>
+                <a:latin typeface="Spoqa Han Sans Neo" pitchFamily="34" charset="0"/>
+                <a:ea typeface="Spoqa Han Sans Neo" pitchFamily="34" charset="-122"/>
+                <a:cs typeface="Spoqa Han Sans Neo" pitchFamily="34" charset="-120"/>
+              </a:rPr>
+              <a:t>MS·메타</a:t>
+            </a:r>
+            <a:endParaRPr lang="en-US" sz="1200" dirty="0"/>
+          </a:p>
+        </p:txBody>
+      </p:sp>
+      <p:sp>
+        <p:nvSpPr>
+          <p:cNvPr id="26" name="Shape 24"/>
+          <p:cNvSpPr/>
+          <p:nvPr/>
+        </p:nvSpPr>
+        <p:spPr>
+          <a:xfrm>
+            <a:off x="6099048" y="3675888"/>
+            <a:ext cx="2706624" cy="457200"/>
+          </a:xfrm>
+          <a:prstGeom prst="roundRect">
+            <a:avLst>
+              <a:gd name="adj" fmla="val 10000"/>
+            </a:avLst>
+          </a:prstGeom>
+          <a:solidFill>
+            <a:srgbClr val="043B72">
+              <a:alpha val="12000"/>
+            </a:srgbClr>
+          </a:solidFill>
+          <a:ln w="9525">
+            <a:solidFill>
+              <a:srgbClr val="043B72"/>
+            </a:solidFill>
+            <a:prstDash val="solid"/>
+          </a:ln>
+        </p:spPr>
+      </p:sp>
+      <p:sp>
+        <p:nvSpPr>
+          <p:cNvPr id="27" name="Text 25"/>
+          <p:cNvSpPr/>
+          <p:nvPr/>
+        </p:nvSpPr>
+        <p:spPr>
+          <a:xfrm>
+            <a:off x="6281928" y="3675888"/>
+            <a:ext cx="2432304" cy="457200"/>
+          </a:xfrm>
+          <a:prstGeom prst="rect">
+            <a:avLst/>
+          </a:prstGeom>
+          <a:noFill/>
+          <a:ln/>
+        </p:spPr>
+        <p:txBody>
+          <a:bodyPr wrap="square" lIns="0" tIns="0" rIns="0" bIns="0" rtlCol="0" anchor="ctr"/>
+          <a:lstStyle/>
+          <a:p>
+            <a:pPr indent="0" marL="0">
+              <a:buNone/>
+            </a:pPr>
+            <a:r>
+              <a:rPr lang="en-US" sz="1200" b="1" dirty="0">
+                <a:solidFill>
+                  <a:srgbClr val="043B72"/>
+                </a:solidFill>
+                <a:latin typeface="Spoqa Han Sans Neo" pitchFamily="34" charset="0"/>
+                <a:ea typeface="Spoqa Han Sans Neo" pitchFamily="34" charset="-122"/>
+                <a:cs typeface="Spoqa Han Sans Neo" pitchFamily="34" charset="-120"/>
+              </a:rPr>
+              <a:t>7/30   </a:t>
+            </a:r>
+            <a:pPr indent="0" marL="0">
+              <a:buNone/>
+            </a:pPr>
+            <a:r>
+              <a:rPr lang="en-US" sz="1250" b="1" dirty="0">
+                <a:solidFill>
+                  <a:srgbClr val="1A1A1A"/>
+                </a:solidFill>
+                <a:latin typeface="Spoqa Han Sans Neo" pitchFamily="34" charset="0"/>
+                <a:ea typeface="Spoqa Han Sans Neo" pitchFamily="34" charset="-122"/>
+                <a:cs typeface="Spoqa Han Sans Neo" pitchFamily="34" charset="-120"/>
+              </a:rPr>
+              <a:t>삼성전자</a:t>
+            </a:r>
+            <a:endParaRPr lang="en-US" sz="1200" dirty="0"/>
+          </a:p>
+        </p:txBody>
+      </p:sp>
+      <p:sp>
+        <p:nvSpPr>
+          <p:cNvPr id="28" name="Shape 26"/>
+          <p:cNvSpPr/>
+          <p:nvPr/>
+        </p:nvSpPr>
+        <p:spPr>
+          <a:xfrm>
+            <a:off x="8897112" y="3675888"/>
+            <a:ext cx="2706624" cy="457200"/>
+          </a:xfrm>
+          <a:prstGeom prst="roundRect">
+            <a:avLst>
+              <a:gd name="adj" fmla="val 10000"/>
+            </a:avLst>
+          </a:prstGeom>
+          <a:solidFill>
+            <a:srgbClr val="0086B8">
+              <a:alpha val="12000"/>
+            </a:srgbClr>
+          </a:solidFill>
+          <a:ln w="9525">
+            <a:solidFill>
+              <a:srgbClr val="0086B8"/>
+            </a:solidFill>
+            <a:prstDash val="solid"/>
+          </a:ln>
+        </p:spPr>
+      </p:sp>
+      <p:sp>
+        <p:nvSpPr>
+          <p:cNvPr id="29" name="Text 27"/>
+          <p:cNvSpPr/>
+          <p:nvPr/>
+        </p:nvSpPr>
+        <p:spPr>
+          <a:xfrm>
+            <a:off x="9079992" y="3675888"/>
+            <a:ext cx="2432304" cy="457200"/>
+          </a:xfrm>
+          <a:prstGeom prst="rect">
+            <a:avLst/>
+          </a:prstGeom>
+          <a:noFill/>
+          <a:ln/>
+        </p:spPr>
+        <p:txBody>
+          <a:bodyPr wrap="square" lIns="0" tIns="0" rIns="0" bIns="0" rtlCol="0" anchor="ctr"/>
+          <a:lstStyle/>
+          <a:p>
+            <a:pPr indent="0" marL="0">
+              <a:buNone/>
+            </a:pPr>
+            <a:r>
+              <a:rPr lang="en-US" sz="1200" b="1" dirty="0">
+                <a:solidFill>
+                  <a:srgbClr val="0086B8"/>
+                </a:solidFill>
+                <a:latin typeface="Spoqa Han Sans Neo" pitchFamily="34" charset="0"/>
+                <a:ea typeface="Spoqa Han Sans Neo" pitchFamily="34" charset="-122"/>
+                <a:cs typeface="Spoqa Han Sans Neo" pitchFamily="34" charset="-120"/>
+              </a:rPr>
+              <a:t>7/30   </a:t>
+            </a:r>
+            <a:pPr indent="0" marL="0">
+              <a:buNone/>
+            </a:pPr>
+            <a:r>
+              <a:rPr lang="en-US" sz="1250" b="1" dirty="0">
+                <a:solidFill>
+                  <a:srgbClr val="1A1A1A"/>
+                </a:solidFill>
+                <a:latin typeface="Spoqa Han Sans Neo" pitchFamily="34" charset="0"/>
+                <a:ea typeface="Spoqa Han Sans Neo" pitchFamily="34" charset="-122"/>
+                <a:cs typeface="Spoqa Han Sans Neo" pitchFamily="34" charset="-120"/>
+              </a:rPr>
+              <a:t>아마존</a:t>
+            </a:r>
+            <a:endParaRPr lang="en-US" sz="1200" dirty="0"/>
+          </a:p>
+        </p:txBody>
+      </p:sp>
+      <p:sp>
+        <p:nvSpPr>
+          <p:cNvPr id="30" name="Shape 28"/>
+          <p:cNvSpPr/>
+          <p:nvPr/>
+        </p:nvSpPr>
+        <p:spPr>
+          <a:xfrm>
+            <a:off x="502920" y="4261104"/>
+            <a:ext cx="11183112" cy="1207008"/>
+          </a:xfrm>
+          <a:prstGeom prst="roundRect">
+            <a:avLst>
+              <a:gd name="adj" fmla="val 4545"/>
             </a:avLst>
           </a:prstGeom>
           <a:solidFill>
@@ -17273,30 +17601,30 @@
       </p:sp>
       <p:sp>
         <p:nvSpPr>
-          <p:cNvPr id="23" name="Text 21"/>
-          <p:cNvSpPr/>
-          <p:nvPr/>
-        </p:nvSpPr>
-        <p:spPr>
-          <a:xfrm>
-            <a:off x="777240" y="3803904"/>
-            <a:ext cx="10515600" cy="347472"/>
-          </a:xfrm>
-          <a:prstGeom prst="rect">
-            <a:avLst/>
-          </a:prstGeom>
-          <a:noFill/>
-          <a:ln/>
-        </p:spPr>
-        <p:txBody>
-          <a:bodyPr wrap="square" lIns="0" tIns="0" rIns="0" bIns="0" rtlCol="0" anchor="ctr"/>
-          <a:lstStyle/>
-          <a:p>
-            <a:pPr indent="0" marL="0">
-              <a:buNone/>
-            </a:pPr>
-            <a:r>
-              <a:rPr lang="en-US" sz="1400" b="1" dirty="0">
+          <p:cNvPr id="31" name="Text 29"/>
+          <p:cNvSpPr/>
+          <p:nvPr/>
+        </p:nvSpPr>
+        <p:spPr>
+          <a:xfrm>
+            <a:off x="777240" y="4343400"/>
+            <a:ext cx="10515600" cy="310896"/>
+          </a:xfrm>
+          <a:prstGeom prst="rect">
+            <a:avLst/>
+          </a:prstGeom>
+          <a:noFill/>
+          <a:ln/>
+        </p:spPr>
+        <p:txBody>
+          <a:bodyPr wrap="square" lIns="0" tIns="0" rIns="0" bIns="0" rtlCol="0" anchor="ctr"/>
+          <a:lstStyle/>
+          <a:p>
+            <a:pPr indent="0" marL="0">
+              <a:buNone/>
+            </a:pPr>
+            <a:r>
+              <a:rPr lang="en-US" sz="1350" b="1" dirty="0">
                 <a:solidFill>
                   <a:srgbClr val="1A1A1A"/>
                 </a:solidFill>
@@ -17310,7 +17638,7 @@
               <a:buNone/>
             </a:pPr>
             <a:r>
-              <a:rPr lang="en-US" sz="1200" dirty="0">
+              <a:rPr lang="en-US" sz="1150" dirty="0">
                 <a:solidFill>
                   <a:srgbClr val="6C6C6C"/>
                 </a:solidFill>
@@ -17320,24 +17648,24 @@
               </a:rPr>
               <a:t>   — 7/29 발표, 분기 사상 최대 전망</a:t>
             </a:r>
-            <a:endParaRPr lang="en-US" sz="1400" dirty="0"/>
-          </a:p>
-        </p:txBody>
-      </p:sp>
-      <p:sp>
-        <p:nvSpPr>
-          <p:cNvPr id="24" name="Shape 22"/>
-          <p:cNvSpPr/>
-          <p:nvPr/>
-        </p:nvSpPr>
-        <p:spPr>
-          <a:xfrm>
-            <a:off x="777240" y="4206240"/>
-            <a:ext cx="2615184" cy="841248"/>
+            <a:endParaRPr lang="en-US" sz="1350" dirty="0"/>
+          </a:p>
+        </p:txBody>
+      </p:sp>
+      <p:sp>
+        <p:nvSpPr>
+          <p:cNvPr id="32" name="Shape 30"/>
+          <p:cNvSpPr/>
+          <p:nvPr/>
+        </p:nvSpPr>
+        <p:spPr>
+          <a:xfrm>
+            <a:off x="777240" y="4700016"/>
+            <a:ext cx="2615184" cy="694944"/>
           </a:xfrm>
           <a:prstGeom prst="roundRect">
             <a:avLst>
-              <a:gd name="adj" fmla="val 4348"/>
+              <a:gd name="adj" fmla="val 5263"/>
             </a:avLst>
           </a:prstGeom>
           <a:solidFill>
@@ -17353,30 +17681,30 @@
       </p:sp>
       <p:sp>
         <p:nvSpPr>
-          <p:cNvPr id="25" name="Text 23"/>
-          <p:cNvSpPr/>
-          <p:nvPr/>
-        </p:nvSpPr>
-        <p:spPr>
-          <a:xfrm>
-            <a:off x="941832" y="4279392"/>
-            <a:ext cx="2331720" cy="274320"/>
-          </a:xfrm>
-          <a:prstGeom prst="rect">
-            <a:avLst/>
-          </a:prstGeom>
-          <a:noFill/>
-          <a:ln/>
-        </p:spPr>
-        <p:txBody>
-          <a:bodyPr wrap="square" lIns="0" tIns="0" rIns="0" bIns="0" rtlCol="0" anchor="ctr"/>
-          <a:lstStyle/>
-          <a:p>
-            <a:pPr indent="0" marL="0">
-              <a:buNone/>
-            </a:pPr>
-            <a:r>
-              <a:rPr lang="en-US" sz="1100" b="1" dirty="0">
+          <p:cNvPr id="33" name="Text 31"/>
+          <p:cNvSpPr/>
+          <p:nvPr/>
+        </p:nvSpPr>
+        <p:spPr>
+          <a:xfrm>
+            <a:off x="941832" y="4745736"/>
+            <a:ext cx="2331720" cy="256032"/>
+          </a:xfrm>
+          <a:prstGeom prst="rect">
+            <a:avLst/>
+          </a:prstGeom>
+          <a:noFill/>
+          <a:ln/>
+        </p:spPr>
+        <p:txBody>
+          <a:bodyPr wrap="square" lIns="0" tIns="0" rIns="0" bIns="0" rtlCol="0" anchor="ctr"/>
+          <a:lstStyle/>
+          <a:p>
+            <a:pPr indent="0" marL="0">
+              <a:buNone/>
+            </a:pPr>
+            <a:r>
+              <a:rPr lang="en-US" sz="1050" b="1" dirty="0">
                 <a:solidFill>
                   <a:srgbClr val="6C6C6C"/>
                 </a:solidFill>
@@ -17386,36 +17714,36 @@
               </a:rPr>
               <a:t>매출</a:t>
             </a:r>
-            <a:endParaRPr lang="en-US" sz="1100" dirty="0"/>
-          </a:p>
-        </p:txBody>
-      </p:sp>
-      <p:sp>
-        <p:nvSpPr>
-          <p:cNvPr id="26" name="Text 24"/>
-          <p:cNvSpPr/>
-          <p:nvPr/>
-        </p:nvSpPr>
-        <p:spPr>
-          <a:xfrm>
-            <a:off x="923544" y="4535424"/>
-            <a:ext cx="2377440" cy="457200"/>
-          </a:xfrm>
-          <a:prstGeom prst="rect">
-            <a:avLst/>
-          </a:prstGeom>
-          <a:noFill/>
-          <a:ln/>
-        </p:spPr>
-        <p:txBody>
-          <a:bodyPr wrap="square" lIns="0" tIns="0" rIns="0" bIns="0" rtlCol="0" anchor="ctr"/>
-          <a:lstStyle/>
-          <a:p>
-            <a:pPr indent="0" marL="0">
-              <a:buNone/>
-            </a:pPr>
-            <a:r>
-              <a:rPr lang="en-US" sz="2500" b="1" dirty="0">
+            <a:endParaRPr lang="en-US" sz="1050" dirty="0"/>
+          </a:p>
+        </p:txBody>
+      </p:sp>
+      <p:sp>
+        <p:nvSpPr>
+          <p:cNvPr id="34" name="Text 32"/>
+          <p:cNvSpPr/>
+          <p:nvPr/>
+        </p:nvSpPr>
+        <p:spPr>
+          <a:xfrm>
+            <a:off x="923544" y="4974336"/>
+            <a:ext cx="2377440" cy="384048"/>
+          </a:xfrm>
+          <a:prstGeom prst="rect">
+            <a:avLst/>
+          </a:prstGeom>
+          <a:noFill/>
+          <a:ln/>
+        </p:spPr>
+        <p:txBody>
+          <a:bodyPr wrap="square" lIns="0" tIns="0" rIns="0" bIns="0" rtlCol="0" anchor="ctr"/>
+          <a:lstStyle/>
+          <a:p>
+            <a:pPr indent="0" marL="0">
+              <a:buNone/>
+            </a:pPr>
+            <a:r>
+              <a:rPr lang="en-US" sz="2200" b="1" dirty="0">
                 <a:solidFill>
                   <a:srgbClr val="F58220"/>
                 </a:solidFill>
@@ -17425,24 +17753,24 @@
               </a:rPr>
               <a:t>84조</a:t>
             </a:r>
-            <a:endParaRPr lang="en-US" sz="2500" dirty="0"/>
-          </a:p>
-        </p:txBody>
-      </p:sp>
-      <p:sp>
-        <p:nvSpPr>
-          <p:cNvPr id="27" name="Shape 25"/>
-          <p:cNvSpPr/>
-          <p:nvPr/>
-        </p:nvSpPr>
-        <p:spPr>
-          <a:xfrm>
-            <a:off x="3511296" y="4206240"/>
-            <a:ext cx="2615184" cy="841248"/>
+            <a:endParaRPr lang="en-US" sz="2200" dirty="0"/>
+          </a:p>
+        </p:txBody>
+      </p:sp>
+      <p:sp>
+        <p:nvSpPr>
+          <p:cNvPr id="35" name="Shape 33"/>
+          <p:cNvSpPr/>
+          <p:nvPr/>
+        </p:nvSpPr>
+        <p:spPr>
+          <a:xfrm>
+            <a:off x="3511296" y="4700016"/>
+            <a:ext cx="2615184" cy="694944"/>
           </a:xfrm>
           <a:prstGeom prst="roundRect">
             <a:avLst>
-              <a:gd name="adj" fmla="val 4348"/>
+              <a:gd name="adj" fmla="val 5263"/>
             </a:avLst>
           </a:prstGeom>
           <a:solidFill>
@@ -17458,30 +17786,30 @@
       </p:sp>
       <p:sp>
         <p:nvSpPr>
-          <p:cNvPr id="28" name="Text 26"/>
-          <p:cNvSpPr/>
-          <p:nvPr/>
-        </p:nvSpPr>
-        <p:spPr>
-          <a:xfrm>
-            <a:off x="3675888" y="4279392"/>
-            <a:ext cx="2331720" cy="274320"/>
-          </a:xfrm>
-          <a:prstGeom prst="rect">
-            <a:avLst/>
-          </a:prstGeom>
-          <a:noFill/>
-          <a:ln/>
-        </p:spPr>
-        <p:txBody>
-          <a:bodyPr wrap="square" lIns="0" tIns="0" rIns="0" bIns="0" rtlCol="0" anchor="ctr"/>
-          <a:lstStyle/>
-          <a:p>
-            <a:pPr indent="0" marL="0">
-              <a:buNone/>
-            </a:pPr>
-            <a:r>
-              <a:rPr lang="en-US" sz="1100" b="1" dirty="0">
+          <p:cNvPr id="36" name="Text 34"/>
+          <p:cNvSpPr/>
+          <p:nvPr/>
+        </p:nvSpPr>
+        <p:spPr>
+          <a:xfrm>
+            <a:off x="3675888" y="4745736"/>
+            <a:ext cx="2331720" cy="256032"/>
+          </a:xfrm>
+          <a:prstGeom prst="rect">
+            <a:avLst/>
+          </a:prstGeom>
+          <a:noFill/>
+          <a:ln/>
+        </p:spPr>
+        <p:txBody>
+          <a:bodyPr wrap="square" lIns="0" tIns="0" rIns="0" bIns="0" rtlCol="0" anchor="ctr"/>
+          <a:lstStyle/>
+          <a:p>
+            <a:pPr indent="0" marL="0">
+              <a:buNone/>
+            </a:pPr>
+            <a:r>
+              <a:rPr lang="en-US" sz="1050" b="1" dirty="0">
                 <a:solidFill>
                   <a:srgbClr val="6C6C6C"/>
                 </a:solidFill>
@@ -17491,36 +17819,36 @@
               </a:rPr>
               <a:t>영업이익</a:t>
             </a:r>
-            <a:endParaRPr lang="en-US" sz="1100" dirty="0"/>
-          </a:p>
-        </p:txBody>
-      </p:sp>
-      <p:sp>
-        <p:nvSpPr>
-          <p:cNvPr id="29" name="Text 27"/>
-          <p:cNvSpPr/>
-          <p:nvPr/>
-        </p:nvSpPr>
-        <p:spPr>
-          <a:xfrm>
-            <a:off x="3657600" y="4535424"/>
-            <a:ext cx="2377440" cy="457200"/>
-          </a:xfrm>
-          <a:prstGeom prst="rect">
-            <a:avLst/>
-          </a:prstGeom>
-          <a:noFill/>
-          <a:ln/>
-        </p:spPr>
-        <p:txBody>
-          <a:bodyPr wrap="square" lIns="0" tIns="0" rIns="0" bIns="0" rtlCol="0" anchor="ctr"/>
-          <a:lstStyle/>
-          <a:p>
-            <a:pPr indent="0" marL="0">
-              <a:buNone/>
-            </a:pPr>
-            <a:r>
-              <a:rPr lang="en-US" sz="2500" b="1" dirty="0">
+            <a:endParaRPr lang="en-US" sz="1050" dirty="0"/>
+          </a:p>
+        </p:txBody>
+      </p:sp>
+      <p:sp>
+        <p:nvSpPr>
+          <p:cNvPr id="37" name="Text 35"/>
+          <p:cNvSpPr/>
+          <p:nvPr/>
+        </p:nvSpPr>
+        <p:spPr>
+          <a:xfrm>
+            <a:off x="3657600" y="4974336"/>
+            <a:ext cx="2377440" cy="384048"/>
+          </a:xfrm>
+          <a:prstGeom prst="rect">
+            <a:avLst/>
+          </a:prstGeom>
+          <a:noFill/>
+          <a:ln/>
+        </p:spPr>
+        <p:txBody>
+          <a:bodyPr wrap="square" lIns="0" tIns="0" rIns="0" bIns="0" rtlCol="0" anchor="ctr"/>
+          <a:lstStyle/>
+          <a:p>
+            <a:pPr indent="0" marL="0">
+              <a:buNone/>
+            </a:pPr>
+            <a:r>
+              <a:rPr lang="en-US" sz="2200" b="1" dirty="0">
                 <a:solidFill>
                   <a:srgbClr val="F58220"/>
                 </a:solidFill>
@@ -17530,24 +17858,24 @@
               </a:rPr>
               <a:t>64조</a:t>
             </a:r>
-            <a:endParaRPr lang="en-US" sz="2500" dirty="0"/>
-          </a:p>
-        </p:txBody>
-      </p:sp>
-      <p:sp>
-        <p:nvSpPr>
-          <p:cNvPr id="30" name="Shape 28"/>
-          <p:cNvSpPr/>
-          <p:nvPr/>
-        </p:nvSpPr>
-        <p:spPr>
-          <a:xfrm>
-            <a:off x="6245352" y="4206240"/>
-            <a:ext cx="2615184" cy="841248"/>
+            <a:endParaRPr lang="en-US" sz="2200" dirty="0"/>
+          </a:p>
+        </p:txBody>
+      </p:sp>
+      <p:sp>
+        <p:nvSpPr>
+          <p:cNvPr id="38" name="Shape 36"/>
+          <p:cNvSpPr/>
+          <p:nvPr/>
+        </p:nvSpPr>
+        <p:spPr>
+          <a:xfrm>
+            <a:off x="6245352" y="4700016"/>
+            <a:ext cx="2615184" cy="694944"/>
           </a:xfrm>
           <a:prstGeom prst="roundRect">
             <a:avLst>
-              <a:gd name="adj" fmla="val 4348"/>
+              <a:gd name="adj" fmla="val 5263"/>
             </a:avLst>
           </a:prstGeom>
           <a:solidFill>
@@ -17563,30 +17891,30 @@
       </p:sp>
       <p:sp>
         <p:nvSpPr>
-          <p:cNvPr id="31" name="Text 29"/>
-          <p:cNvSpPr/>
-          <p:nvPr/>
-        </p:nvSpPr>
-        <p:spPr>
-          <a:xfrm>
-            <a:off x="6409944" y="4279392"/>
-            <a:ext cx="2331720" cy="274320"/>
-          </a:xfrm>
-          <a:prstGeom prst="rect">
-            <a:avLst/>
-          </a:prstGeom>
-          <a:noFill/>
-          <a:ln/>
-        </p:spPr>
-        <p:txBody>
-          <a:bodyPr wrap="square" lIns="0" tIns="0" rIns="0" bIns="0" rtlCol="0" anchor="ctr"/>
-          <a:lstStyle/>
-          <a:p>
-            <a:pPr indent="0" marL="0">
-              <a:buNone/>
-            </a:pPr>
-            <a:r>
-              <a:rPr lang="en-US" sz="1100" b="1" dirty="0">
+          <p:cNvPr id="39" name="Text 37"/>
+          <p:cNvSpPr/>
+          <p:nvPr/>
+        </p:nvSpPr>
+        <p:spPr>
+          <a:xfrm>
+            <a:off x="6409944" y="4745736"/>
+            <a:ext cx="2331720" cy="256032"/>
+          </a:xfrm>
+          <a:prstGeom prst="rect">
+            <a:avLst/>
+          </a:prstGeom>
+          <a:noFill/>
+          <a:ln/>
+        </p:spPr>
+        <p:txBody>
+          <a:bodyPr wrap="square" lIns="0" tIns="0" rIns="0" bIns="0" rtlCol="0" anchor="ctr"/>
+          <a:lstStyle/>
+          <a:p>
+            <a:pPr indent="0" marL="0">
+              <a:buNone/>
+            </a:pPr>
+            <a:r>
+              <a:rPr lang="en-US" sz="1050" b="1" dirty="0">
                 <a:solidFill>
                   <a:srgbClr val="6C6C6C"/>
                 </a:solidFill>
@@ -17596,36 +17924,36 @@
               </a:rPr>
               <a:t>영업이익률</a:t>
             </a:r>
-            <a:endParaRPr lang="en-US" sz="1100" dirty="0"/>
-          </a:p>
-        </p:txBody>
-      </p:sp>
-      <p:sp>
-        <p:nvSpPr>
-          <p:cNvPr id="32" name="Text 30"/>
-          <p:cNvSpPr/>
-          <p:nvPr/>
-        </p:nvSpPr>
-        <p:spPr>
-          <a:xfrm>
-            <a:off x="6391656" y="4535424"/>
-            <a:ext cx="2377440" cy="457200"/>
-          </a:xfrm>
-          <a:prstGeom prst="rect">
-            <a:avLst/>
-          </a:prstGeom>
-          <a:noFill/>
-          <a:ln/>
-        </p:spPr>
-        <p:txBody>
-          <a:bodyPr wrap="square" lIns="0" tIns="0" rIns="0" bIns="0" rtlCol="0" anchor="ctr"/>
-          <a:lstStyle/>
-          <a:p>
-            <a:pPr indent="0" marL="0">
-              <a:buNone/>
-            </a:pPr>
-            <a:r>
-              <a:rPr lang="en-US" sz="2500" b="1" dirty="0">
+            <a:endParaRPr lang="en-US" sz="1050" dirty="0"/>
+          </a:p>
+        </p:txBody>
+      </p:sp>
+      <p:sp>
+        <p:nvSpPr>
+          <p:cNvPr id="40" name="Text 38"/>
+          <p:cNvSpPr/>
+          <p:nvPr/>
+        </p:nvSpPr>
+        <p:spPr>
+          <a:xfrm>
+            <a:off x="6391656" y="4974336"/>
+            <a:ext cx="2377440" cy="384048"/>
+          </a:xfrm>
+          <a:prstGeom prst="rect">
+            <a:avLst/>
+          </a:prstGeom>
+          <a:noFill/>
+          <a:ln/>
+        </p:spPr>
+        <p:txBody>
+          <a:bodyPr wrap="square" lIns="0" tIns="0" rIns="0" bIns="0" rtlCol="0" anchor="ctr"/>
+          <a:lstStyle/>
+          <a:p>
+            <a:pPr indent="0" marL="0">
+              <a:buNone/>
+            </a:pPr>
+            <a:r>
+              <a:rPr lang="en-US" sz="2200" b="1" dirty="0">
                 <a:solidFill>
                   <a:srgbClr val="2E8540"/>
                 </a:solidFill>
@@ -17635,24 +17963,24 @@
               </a:rPr>
               <a:t>76%</a:t>
             </a:r>
-            <a:endParaRPr lang="en-US" sz="2500" dirty="0"/>
-          </a:p>
-        </p:txBody>
-      </p:sp>
-      <p:sp>
-        <p:nvSpPr>
-          <p:cNvPr id="33" name="Shape 31"/>
-          <p:cNvSpPr/>
-          <p:nvPr/>
-        </p:nvSpPr>
-        <p:spPr>
-          <a:xfrm>
-            <a:off x="8979408" y="4206240"/>
-            <a:ext cx="2615184" cy="841248"/>
+            <a:endParaRPr lang="en-US" sz="2200" dirty="0"/>
+          </a:p>
+        </p:txBody>
+      </p:sp>
+      <p:sp>
+        <p:nvSpPr>
+          <p:cNvPr id="41" name="Shape 39"/>
+          <p:cNvSpPr/>
+          <p:nvPr/>
+        </p:nvSpPr>
+        <p:spPr>
+          <a:xfrm>
+            <a:off x="8979408" y="4700016"/>
+            <a:ext cx="2615184" cy="694944"/>
           </a:xfrm>
           <a:prstGeom prst="roundRect">
             <a:avLst>
-              <a:gd name="adj" fmla="val 4348"/>
+              <a:gd name="adj" fmla="val 5263"/>
             </a:avLst>
           </a:prstGeom>
           <a:solidFill>
@@ -17668,30 +17996,30 @@
       </p:sp>
       <p:sp>
         <p:nvSpPr>
-          <p:cNvPr id="34" name="Text 32"/>
-          <p:cNvSpPr/>
-          <p:nvPr/>
-        </p:nvSpPr>
-        <p:spPr>
-          <a:xfrm>
-            <a:off x="9144000" y="4279392"/>
-            <a:ext cx="2331720" cy="274320"/>
-          </a:xfrm>
-          <a:prstGeom prst="rect">
-            <a:avLst/>
-          </a:prstGeom>
-          <a:noFill/>
-          <a:ln/>
-        </p:spPr>
-        <p:txBody>
-          <a:bodyPr wrap="square" lIns="0" tIns="0" rIns="0" bIns="0" rtlCol="0" anchor="ctr"/>
-          <a:lstStyle/>
-          <a:p>
-            <a:pPr indent="0" marL="0">
-              <a:buNone/>
-            </a:pPr>
-            <a:r>
-              <a:rPr lang="en-US" sz="1100" b="1" dirty="0">
+          <p:cNvPr id="42" name="Text 40"/>
+          <p:cNvSpPr/>
+          <p:nvPr/>
+        </p:nvSpPr>
+        <p:spPr>
+          <a:xfrm>
+            <a:off x="9144000" y="4745736"/>
+            <a:ext cx="2331720" cy="256032"/>
+          </a:xfrm>
+          <a:prstGeom prst="rect">
+            <a:avLst/>
+          </a:prstGeom>
+          <a:noFill/>
+          <a:ln/>
+        </p:spPr>
+        <p:txBody>
+          <a:bodyPr wrap="square" lIns="0" tIns="0" rIns="0" bIns="0" rtlCol="0" anchor="ctr"/>
+          <a:lstStyle/>
+          <a:p>
+            <a:pPr indent="0" marL="0">
+              <a:buNone/>
+            </a:pPr>
+            <a:r>
+              <a:rPr lang="en-US" sz="1050" b="1" dirty="0">
                 <a:solidFill>
                   <a:srgbClr val="6C6C6C"/>
                 </a:solidFill>
@@ -17701,36 +18029,36 @@
               </a:rPr>
               <a:t>상반기 누적</a:t>
             </a:r>
-            <a:endParaRPr lang="en-US" sz="1100" dirty="0"/>
-          </a:p>
-        </p:txBody>
-      </p:sp>
-      <p:sp>
-        <p:nvSpPr>
-          <p:cNvPr id="35" name="Text 33"/>
-          <p:cNvSpPr/>
-          <p:nvPr/>
-        </p:nvSpPr>
-        <p:spPr>
-          <a:xfrm>
-            <a:off x="9125712" y="4535424"/>
-            <a:ext cx="2377440" cy="457200"/>
-          </a:xfrm>
-          <a:prstGeom prst="rect">
-            <a:avLst/>
-          </a:prstGeom>
-          <a:noFill/>
-          <a:ln/>
-        </p:spPr>
-        <p:txBody>
-          <a:bodyPr wrap="square" lIns="0" tIns="0" rIns="0" bIns="0" rtlCol="0" anchor="ctr"/>
-          <a:lstStyle/>
-          <a:p>
-            <a:pPr indent="0" marL="0">
-              <a:buNone/>
-            </a:pPr>
-            <a:r>
-              <a:rPr lang="en-US" sz="2500" b="1" dirty="0">
+            <a:endParaRPr lang="en-US" sz="1050" dirty="0"/>
+          </a:p>
+        </p:txBody>
+      </p:sp>
+      <p:sp>
+        <p:nvSpPr>
+          <p:cNvPr id="43" name="Text 41"/>
+          <p:cNvSpPr/>
+          <p:nvPr/>
+        </p:nvSpPr>
+        <p:spPr>
+          <a:xfrm>
+            <a:off x="9125712" y="4974336"/>
+            <a:ext cx="2377440" cy="384048"/>
+          </a:xfrm>
+          <a:prstGeom prst="rect">
+            <a:avLst/>
+          </a:prstGeom>
+          <a:noFill/>
+          <a:ln/>
+        </p:spPr>
+        <p:txBody>
+          <a:bodyPr wrap="square" lIns="0" tIns="0" rIns="0" bIns="0" rtlCol="0" anchor="ctr"/>
+          <a:lstStyle/>
+          <a:p>
+            <a:pPr indent="0" marL="0">
+              <a:buNone/>
+            </a:pPr>
+            <a:r>
+              <a:rPr lang="en-US" sz="2200" b="1" dirty="0">
                 <a:solidFill>
                   <a:srgbClr val="043B72"/>
                 </a:solidFill>
@@ -17740,24 +18068,24 @@
               </a:rPr>
               <a:t>≈100조</a:t>
             </a:r>
-            <a:endParaRPr lang="en-US" sz="2500" dirty="0"/>
-          </a:p>
-        </p:txBody>
-      </p:sp>
-      <p:sp>
-        <p:nvSpPr>
-          <p:cNvPr id="36" name="Shape 34"/>
-          <p:cNvSpPr/>
-          <p:nvPr/>
-        </p:nvSpPr>
-        <p:spPr>
-          <a:xfrm>
-            <a:off x="502920" y="5303520"/>
-            <a:ext cx="11183112" cy="749808"/>
+            <a:endParaRPr lang="en-US" sz="2200" dirty="0"/>
+          </a:p>
+        </p:txBody>
+      </p:sp>
+      <p:sp>
+        <p:nvSpPr>
+          <p:cNvPr id="44" name="Shape 42"/>
+          <p:cNvSpPr/>
+          <p:nvPr/>
+        </p:nvSpPr>
+        <p:spPr>
+          <a:xfrm>
+            <a:off x="502920" y="5577840"/>
+            <a:ext cx="11183112" cy="512064"/>
           </a:xfrm>
           <a:prstGeom prst="roundRect">
             <a:avLst>
-              <a:gd name="adj" fmla="val 6098"/>
+              <a:gd name="adj" fmla="val 8929"/>
             </a:avLst>
           </a:prstGeom>
           <a:solidFill>
@@ -17775,30 +18103,30 @@
       </p:sp>
       <p:sp>
         <p:nvSpPr>
-          <p:cNvPr id="37" name="Text 35"/>
-          <p:cNvSpPr/>
-          <p:nvPr/>
-        </p:nvSpPr>
-        <p:spPr>
-          <a:xfrm>
-            <a:off x="777240" y="5303520"/>
-            <a:ext cx="10607040" cy="749808"/>
-          </a:xfrm>
-          <a:prstGeom prst="rect">
-            <a:avLst/>
-          </a:prstGeom>
-          <a:noFill/>
-          <a:ln/>
-        </p:spPr>
-        <p:txBody>
-          <a:bodyPr wrap="square" lIns="0" tIns="0" rIns="0" bIns="0" rtlCol="0" anchor="ctr"/>
-          <a:lstStyle/>
-          <a:p>
-            <a:pPr indent="0" marL="0">
-              <a:buNone/>
-            </a:pPr>
-            <a:r>
-              <a:rPr lang="en-US" sz="1300" b="1" dirty="0">
+          <p:cNvPr id="45" name="Text 43"/>
+          <p:cNvSpPr/>
+          <p:nvPr/>
+        </p:nvSpPr>
+        <p:spPr>
+          <a:xfrm>
+            <a:off x="777240" y="5577840"/>
+            <a:ext cx="10607040" cy="512064"/>
+          </a:xfrm>
+          <a:prstGeom prst="rect">
+            <a:avLst/>
+          </a:prstGeom>
+          <a:noFill/>
+          <a:ln/>
+        </p:spPr>
+        <p:txBody>
+          <a:bodyPr wrap="square" lIns="0" tIns="0" rIns="0" bIns="0" rtlCol="0" anchor="ctr"/>
+          <a:lstStyle/>
+          <a:p>
+            <a:pPr indent="0" marL="0">
+              <a:buNone/>
+            </a:pPr>
+            <a:r>
+              <a:rPr lang="en-US" sz="1200" b="1" dirty="0">
                 <a:solidFill>
                   <a:srgbClr val="043B72"/>
                 </a:solidFill>
@@ -17812,7 +18140,7 @@
               <a:buNone/>
             </a:pPr>
             <a:r>
-              <a:rPr lang="en-US" sz="1250" dirty="0">
+              <a:rPr lang="en-US" sz="1150" dirty="0">
                 <a:solidFill>
                   <a:srgbClr val="3D3D3D"/>
                 </a:solidFill>
@@ -17820,15 +18148,15 @@
                 <a:ea typeface="Spoqa Han Sans Neo" pitchFamily="34" charset="-122"/>
                 <a:cs typeface="Spoqa Han Sans Neo" pitchFamily="34" charset="-120"/>
               </a:rPr>
-              <a:t>부문별 세부 실적·하반기 전망 공개. 메모리 초호황의 '영업 레버리지' 수혜 폭이 관건.</a:t>
-            </a:r>
-            <a:endParaRPr lang="en-US" sz="1300" dirty="0"/>
-          </a:p>
-        </p:txBody>
-      </p:sp>
-      <p:sp>
-        <p:nvSpPr>
-          <p:cNvPr id="38" name="Text 36"/>
+              <a:t>부문별 세부 실적·하반기 전망 공개 · 메모리 '영업 레버리지' 수혜 폭이 관건.</a:t>
+            </a:r>
+            <a:endParaRPr lang="en-US" sz="1200" dirty="0"/>
+          </a:p>
+        </p:txBody>
+      </p:sp>
+      <p:sp>
+        <p:nvSpPr>
+          <p:cNvPr id="46" name="Text 44"/>
           <p:cNvSpPr/>
           <p:nvPr/>
         </p:nvSpPr>
@@ -17867,7 +18195,7 @@
       </p:sp>
       <p:sp>
         <p:nvSpPr>
-          <p:cNvPr id="39" name="Text 37"/>
+          <p:cNvPr id="47" name="Text 45"/>
           <p:cNvSpPr/>
           <p:nvPr/>
         </p:nvSpPr>
